--- a/originals/Data Visualizationand Analysis/Lecture 1 - VISIT - How to plot IBAMR Data.pptx
+++ b/originals/Data Visualizationand Analysis/Lecture 1 - VISIT - How to plot IBAMR Data.pptx
@@ -10841,16 +10841,8 @@
           <a:lstStyle/>
           <a:p>
             <a:r>
-              <a:rPr lang="en-US" sz="2400" dirty="0">
-                <a:hlinkClick r:id="rId2"/>
-              </a:rPr>
-              <a:t>https://</a:t>
-            </a:r>
-            <a:r>
-              <a:rPr lang="en-US" sz="2400" dirty="0" smtClean="0">
-                <a:hlinkClick r:id="rId2"/>
-              </a:rPr>
-              <a:t>drive.google.com/open?id=1thvMjhnjRB5gNtvCPoCX8T85-UShohyl</a:t>
+              <a:rPr lang="en-US" sz="2400" dirty="0"/>
+              <a:t>[link removed]</a:t>
             </a:r>
             <a:endParaRPr lang="en-US" sz="2400" dirty="0" smtClean="0"/>
           </a:p>
